--- a/slides/Chapter 16 - Civil Liberties and Civil Rights (Lecture Deck).pptx
+++ b/slides/Chapter 16 - Civil Liberties and Civil Rights (Lecture Deck).pptx
@@ -635,7 +635,7 @@
 WHAT STUDENTS GET WRONG: they think this case says flag burning is a good idea,
 or that the Court approved of Johnson. It says neither. It says the state lacked
 power to punish him for the idea he expressed.
-BRIDGE TO THE NEXT SLIDE: if this principle protects speech we find offensive,
+BRIDGE TO THE NEXT SLIDE: if this principle protects speech many find deeply offensive,
 what are its limits? Not everything is protected.</a:t>
             </a:r>
             <a:endParaRPr lang="en-US" dirty="0"/>
@@ -3678,7 +3678,7 @@
                 <a:ea typeface="Cambria" pitchFamily="34" charset="-122"/>
                 <a:cs typeface="Cambria" pitchFamily="34" charset="-120"/>
               </a:rPr>
-              <a:t>Speech we hate is still speech</a:t>
+              <a:t>Protection doesn't depend on approval</a:t>
             </a:r>
             <a:endParaRPr lang="en-US" sz="3200" dirty="0"/>
           </a:p>
@@ -6844,7 +6844,7 @@
                 <a:ea typeface="Calibri" pitchFamily="34" charset="-122"/>
                 <a:cs typeface="Calibri" pitchFamily="34" charset="-120"/>
               </a:rPr>
-              <a:t>Texas v. Johnson protected speech most Americans found offensive. Is there any expression you would give government the power to punish — and who would you trust to draw that line?</a:t>
+              <a:t>Texas v. Johnson protected speech many Americans found deeply offensive. Is there any expression you would give government the power to punish — and who would you trust to draw that line?</a:t>
             </a:r>
             <a:endParaRPr lang="en-US" sz="1600" dirty="0"/>
           </a:p>

--- a/slides/Chapter 16 - Civil Liberties and Civil Rights (Lecture Deck).pptx
+++ b/slides/Chapter 16 - Civil Liberties and Civil Rights (Lecture Deck).pptx
@@ -527,11 +527,11 @@
           <a:p>
             <a:r>
               <a:rPr lang="en-US" dirty="0"/>
-              <a:t>CHAPTER 16 — CIVIL LIBERTIES AND CIVIL RIGHTS IN TEXAS
+              <a:t>CHAPTER 16: CIVIL LIBERTIES AND CIVIL RIGHTS IN TEXAS
 Full deck runs about 70 minutes with two discussion breaks; see the "How to use
 this deck" slide for shorter versions.
 OPENING (2 min). Ask before showing anything else: "Name a right you have."
-Students almost always name liberties — speech, religion, guns. Note that, then
+Students almost always name liberties, speech, religion, guns. Note that, then
 ask: "Is the right to be treated equally by your government on that list?" That
 gap IS the chapter. Write both words on the board and leave them there.
 Why Texas: this state generated an unusual share of the nation's landmark rights
@@ -724,13 +724,13 @@
           <a:p>
             <a:r>
               <a:rPr lang="en-US" dirty="0"/>
-              <a:t>TIMING: 3 minutes. Move briskly — this is a reference slide, not a discussion one.
+              <a:t>TIMING: 3 minutes. Move briskly, this is a reference slide, not a discussion one.
 The distinction that does all the work: regulating the TIME, PLACE, or MANNER of
 speech is generally fine; regulating the VIEWPOINT is generally not. A city can
 require a parade permit. It cannot grant permits only to parades it agrees with.
 COMMON MISCONCEPTION: "hate speech is illegal." In the United States it generally
 is not, unless it crosses into incitement, true threats, or harassment. Students
-often find this genuinely surprising, and some find it troubling — that reaction
+often find this genuinely surprising, and some find it troubling, that reaction
 is worth acknowledging rather than brushing past. Many other democracies draw
 this line differently.</a:t>
             </a:r>
@@ -822,12 +822,12 @@
               <a:rPr lang="en-US" dirty="0"/>
               <a:t>TIMING: 4 minutes.
 Both clauses are in the same sentence of the First Amendment, and they can point
-in opposite directions. That tension is the entire subject — not a flaw in the
+in opposite directions. That tension is the entire subject, not a flaw in the
 Constitution but a genuine difficulty.
 DOCTRINAL SHIFT WORTH NAMING: for decades courts used the three-part Lemon test
 for Establishment Clause questions. In recent years the Supreme Court has moved
 toward asking whether a practice fits the nation's history and traditions. That
-shift is not academic — it is why the next slide's case came out the way it did
+shift is not academic, it is why the next slide's case came out the way it did
 at the appellate level.
 Keep your own view out of it here. Students in a Texas classroom hold sincere and
 opposing positions on exactly this question, and several are watching to see
@@ -921,7 +921,7 @@
               <a:rPr lang="en-US" dirty="0"/>
               <a:t>TIMING: 7 minutes including discussion. This is the deck's main discussion slide.
 ⚠ CHECK CURRENCY BEFORE TEACHING. This litigation was live as of the 2026–27
-academic year. Confirm the current posture before class — a Supreme Court grant,
+academic year. Confirm the current posture before class, a Supreme Court grant,
 denial, or ruling would change the last box. The module and this deck are
 reviewed each legislative session.
 HOW TO RUN THE DISCUSSION (this works better than open debate):
@@ -1022,10 +1022,10 @@
           <a:p>
             <a:r>
               <a:rPr lang="en-US" dirty="0"/>
-              <a:t>CRITICAL-THINKING PAUSE — 5 to 8 minutes. Optional; cut it if you are short on
+              <a:t>CRITICAL-THINKING PAUSE: 5 to 8 minutes. Optional; cut it if you are short on
 time, since nothing later depends on it.
 HOW TO RUN IT: pick ONE question rather than all three. Give students 90 seconds
-to write an answer before anyone speaks — written-first produces far better
+to write an answer before anyone speaks, written-first produces far better
 discussion than cold open debate, and it gives quieter students a foothold.
 Q1 is the strongest for a general class. Most students will initially say "no
 limits," then immediately propose one when pressed on threats or harassment.
@@ -1033,7 +1033,7 @@
 about where and who decides.
 Q2 rewards students who read the module. There is no clean answer, and saying so
 is honest.
-Q3 is the one to use if the room is tense — it redirects from belief to evidence,
+Q3 is the one to use if the room is tense, it redirects from belief to evidence,
 which lowers the temperature without dodging the question.
 Do not resolve these. The point is that students can hold the tension.</a:t>
             </a:r>
@@ -1123,10 +1123,10 @@
           <a:p>
             <a:r>
               <a:rPr lang="en-US" dirty="0"/>
-              <a:t>TRANSITION SLIDE — 1 minute, or a natural break point if you split this across
+              <a:t>TRANSITION SLIDE: 1 minute, or a natural break point if you split this across
 two class meetings.
-Reset the frame here: everything before this slide was about LIBERTIES —
-government power over individuals. Everything after is about RIGHTS — equal
+Reset the frame here: everything before this slide was about LIBERTIES , 
+government power over individuals. Everything after is about RIGHTS: equal
 treatment. Say that explicitly; students lose the thread otherwise.
 If you are teaching this in one 50-minute session, this is where to stop and pick
 up next time.</a:t>
@@ -1219,12 +1219,12 @@
               <a:rPr lang="en-US" dirty="0"/>
               <a:t>TIMING: 4 minutes.
 The sequence is the point: legal freedom in 1865 did not produce equal
-citizenship. Ask why not — students usually name violence and social custom, and
+citizenship. Ask why not, students usually name violence and social custom, and
 miss the LEGAL machinery. Push them toward the poll tax and the white primary.
 WHY THE WHITE PRIMARY WAS SO EFFECTIVE: in a one-party state the Democratic
 primary decided every office. The November election was a formality. Excluding
 Black voters from the primary excluded them from the only contest that mattered
-— while technically leaving them "the vote."
+,  while technically leaving them "the vote."
 Juneteenth is worth a moment. Many students celebrate it without knowing it
 originates in Galveston, or that it marks enforcement rather than the
 Emancipation Proclamation itself.</a:t>
@@ -1315,19 +1315,19 @@
           <a:p>
             <a:r>
               <a:rPr lang="en-US" dirty="0"/>
-              <a:t>TIMING: 10 minutes — the heart of the chapter. Roughly 3 minutes per case.
+              <a:t>TIMING: 10 minutes. the heart of the chapter. Roughly 3 minutes per case.
 Teach these as PEOPLE, not citations. A dentist. A mail carrier. A defendant.
 None held office. None had power. Each changed the law for millions.
 SMITH: Texas had defended the white primary for two decades, and in 1935 the
 Court had ALLOWED it, reasoning a party was a private club. Smith reversed that.
-Note the young Thurgood Marshall — future Justice — arguing it.
+Note the young Thurgood Marshall, future Justice, arguing it.
 SWEATT: the state's response to a qualified Black applicant was to invent a
-separate law school in rented rooms. Vinson's reasoning — that a school cannot be
-equal in faculty, reputation, and alumni standing — is what made Brown possible.
+separate law school in rented rooms. Vinson's reasoning, that a school cannot be
+equal in faculty, reputation, and alumni standing, is what made Brown possible.
 HERNANDEZ: the one students have never heard of, and the one with the widest
 reach today. Warren's "class apart" logic protects every ethnic group in America.
 Argued by Gus Garcia and Carlos Cadena with LULAC and the American GI Forum.
-Ask why this case is so much less famous than Brown — it is a good question with
+Ask why this case is so much less famous than Brown, it is a good question with
 no comfortable answer.</a:t>
             </a:r>
             <a:endParaRPr lang="en-US" dirty="0"/>
@@ -1416,7 +1416,7 @@
           <a:p>
             <a:r>
               <a:rPr lang="en-US" dirty="0"/>
-              <a:t>CRITICAL-THINKING PAUSE — 5 to 8 minutes.
+              <a:t>CRITICAL-THINKING PAUSE: 5 to 8 minutes.
 Q1 connects the whole chapter. Push past "ordinary people can make a difference"
 to the harder part: Smith, Sweatt, and Hernandez took real personal risk, waited
 years, and needed organizations (NAACP, LULAC, the American GI Forum) behind
@@ -1518,13 +1518,13 @@
               <a:t>TIMING: 6 minutes. If students remember ONE framework from this course, make it
 this one. It transfers to every rights dispute they will read about for the rest
 of their lives.
-THE KEY INSIGHT — say it directly: the level of scrutiny usually determines the
+THE KEY INSIGHT: say it directly: the level of scrutiny usually determines the
 outcome. Strict scrutiny is nearly fatal to a law. Rational basis is nearly
 always survivable. So the real fight in most modern cases is not "is this
 discrimination?" but "which tier applies?"
 TEXAS WRINKLE: the Texas ERA names sex, race, color, creed, and national origin
 explicitly, so a state claim can rest on text rather than judicial interpretation.
-QUICK PRACTICE — put one on the board and cold call:
+QUICK PRACTICE: put one on the board and cold call:
   "A Texas law gives a property tax break to homeowners over 65." → rational
   basis (age), and it survives.
   "A city hires only men as firefighters." → intermediate scrutiny, and it fails.
@@ -1617,7 +1617,7 @@
           <a:p>
             <a:r>
               <a:rPr lang="en-US" dirty="0"/>
-              <a:t>INSTRUCTOR-ONLY SLIDE — delete it before projecting.
+              <a:t>INSTRUCTOR-ONLY SLIDE: delete it before projecting.
 Everything in this deck is editable. If you disagree with a framing, change it;
 nothing here is locked or rendered as an image.
 A note on the two-panel slides: the panels are never labeled with a party name.
@@ -1715,7 +1715,7 @@
 THE TEXTUAL HOOK: the Fourteenth Amendment says "any PERSON," not "any citizen."
 Have a student read the clause aloud and find that word. It does a lot of work.
 Another 5–4 case. The dissent argued this was a policy judgment for legislatures
-rather than courts — worth presenting fairly.
+rather than courts, worth presenting fairly.
 CURRENCY NOTE: state authority over immigration is actively litigated, including
 Texas's SB 4 (2023). Check the posture before teaching if you plan to go beyond
 Plyler itself.
@@ -1910,7 +1910,7 @@
           <a:p>
             <a:r>
               <a:rPr lang="en-US" dirty="0"/>
-              <a:t>CRITICAL-THINKING PAUSE — 6 to 10 minutes. This is the most assessment-aligned
+              <a:t>CRITICAL-THINKING PAUSE: 6 to 10 minutes. This is the most assessment-aligned
 of the three; Q1 mirrors the format of several TEST-BANK Part A items and the
 Chapter 16 reflection prompt.
 Q1 IS THE ONE TO USE IF YOU ONLY USE ONE. Requiring the strongest argument for
@@ -2010,14 +2010,14 @@
             <a:r>
               <a:rPr lang="en-US" dirty="0"/>
               <a:t>TIMING: 4 minutes. This is the chapter's closing argument and it satisfies ACGM
-Outcome 7 (rights AND responsibilities) — do not skip it for time.
+Outcome 7 (rights AND responsibilities), do not skip it for time.
 ITEM 3 IS THE HARD ONE and the most important. Ask directly: "Is there a liberty
 you would deny to people you strongly oppose?" Let the discomfort sit. Then:
 "What would that cost you if the majority changed its mind about your group?"
 Connect back to Johnson. The principle that protected a flag burner in Dallas is
 the same principle that protects a protest you support.
 CLOSING LINE that works: "The next landmark case hasn't been filed yet. It will
-start the same way all of these did — with one person who knew their rights."</a:t>
+start the same way all of these did, with one person who knew their rights."</a:t>
             </a:r>
             <a:endParaRPr lang="en-US" dirty="0"/>
           </a:p>
@@ -2105,12 +2105,12 @@
           <a:p>
             <a:r>
               <a:rPr lang="en-US" dirty="0"/>
-              <a:t>INSTRUCTOR SLIDE — keep it or delete it depending on whether you want students to
+              <a:t>INSTRUCTOR SLIDE: keep it or delete it depending on whether you want students to
 see the assessment plan. Many instructors do show it; transparency about what is
 graded reduces anxiety and email.
 If you assign the module as homework BEFORE lecture, this deck works as
 consolidation and you can cut slides 4 and 9 (they will have the basics).
-If you lecture FIRST, keep everything — the module then serves as review.
+If you lecture FIRST, keep everything, the module then serves as review.
 The Completion Report carries a tamper-evident integrity hash, so it is usable as
 a graded artifact. Reflections are included in full in the report.</a:t>
             </a:r>
@@ -2201,7 +2201,7 @@
             <a:r>
               <a:rPr lang="en-US" dirty="0"/>
               <a:t>Leave this slide up during questions so students can photograph it.
-Oyez is the single best resource to point students toward — free, and the oral
+Oyez is the single best resource to point students toward, free, and the oral
 argument audio makes these cases feel like arguments between real people rather
 than settled text. Smith v. Allwright with a young Thurgood Marshall is
 especially worth assigning.
@@ -2294,7 +2294,7 @@
           <a:p>
             <a:r>
               <a:rPr lang="en-US" dirty="0"/>
-              <a:t>CLOSING — 2 minutes, or use as the exit-ticket prompt.
+              <a:t>CLOSING: 2 minutes, or use as the exit-ticket prompt.
 Let the question sit without answering it. Silence is fine here.
 If you want a written exit ticket: "Answer the question on the screen in three
 sentences." It maps directly onto the Chapter 16 reflection prompt, so students
@@ -2389,7 +2389,7 @@
           <a:p>
             <a:r>
               <a:rPr lang="en-US" dirty="0"/>
-              <a:t>TIMING: 1 minute. Don't read these aloud line by line — students tune out.
+              <a:t>TIMING: 1 minute. Don't read these aloud line by line, students tune out.
 Point at #1 and #4 only. Those are the two things they will actually be assessed
 on and the two they most often get wrong. Everything else supports them.
 Objective 4 (levels of scrutiny) is the single most transferable idea in the
@@ -2484,14 +2484,14 @@
               <a:t>TIMING: 6 minutes. This is the highest-value slide in the deck.
 Teach the test at the bottom, not the lists. Students memorize lists and then
 misapply them; the two sentences transfer.
-WORKED EXAMPLE — put it on the board:
+WORKED EXAMPLE: put it on the board:
 A city bans all protests within 500 feet of city hall.
   → LIBERTIES claim. The city had no power to silence peaceful assembly.
 Now change one fact: the city permits some groups to march and denies others
 because of their message or their members' ethnicity.
   → RIGHTS claim. Same ordinance, unequal application.
 COMMON MISCONCEPTION: students think liberties are "in the Bill of Rights" and
-rights are "civil rights era." Not so — both appear in both places. The
+rights are "civil rights era." Not so, both appear in both places. The
 distinction is about what government is being accused of, not where the text sits.
 COLD CALL: "You're denied a business permit. What do you need to know before you
 can tell me which kind of claim you have?" (Answer: whether others got one.)</a:t>
@@ -2583,13 +2583,13 @@
             <a:r>
               <a:rPr lang="en-US" dirty="0"/>
               <a:t>TIMING: 3 minutes.
-The point is not Texas pride — it's that constitutional law is made by ordinary
+The point is not Texas pride, it's that constitutional law is made by ordinary
 people with specific grievances, not by philosophers.
 Preview the seven so students hear the names early: Johnson (flag burning),
 Smith v. Allwright (white primary), Sweatt (UT law school), Hernandez (juries),
 Lawrence (privacy), Plyler (school access), Fisher (admissions).
 If you want a hook: ask which of those they've heard of. Most will know flag
-burning and none will know Hernandez. That asymmetry is worth naming out loud —
+burning and none will know Hernandez. That asymmetry is worth naming out loud , 
 whose rights cases get remembered is itself a question worth asking.</a:t>
             </a:r>
             <a:endParaRPr lang="en-US" dirty="0"/>
@@ -2680,13 +2680,13 @@
               <a:rPr lang="en-US" dirty="0"/>
               <a:t>TIMING: 4 minutes.
 The placement is the lesson. Ask: "Why would you put limits on government BEFORE
-you describe the government?" Answer: because you don't trust it — and Texans in
+you describe the government?" Answer: because you don't trust it, and Texans in
 1876 had a specific reason not to.
 Connect back to Chapter 2. This is the same Davis reaction that produced the weak
 governor, the part-time legislature, and elected judges. One historical grievance
 shaped the whole document.
 Section 29 is worth reading aloud. Most state constitutions don't say this so
-bluntly. Rights here are not favors the legislature grants — they are boundaries
+bluntly. Rights here are not favors the legislature grants, they are boundaries
 it cannot cross.</a:t>
             </a:r>
             <a:endParaRPr lang="en-US" dirty="0"/>
@@ -2779,7 +2779,7 @@
 This surprises students, and the surprise is pedagogically useful. Many arrive
 believing Texas is uniformly less protective of rights than the federal
 government. Here is a documented counterexample.
-ASK: "If the federal ERA had passed, would this Texas provision matter?" Yes —
+ASK: "If the federal ERA had passed, would this Texas provision matter?" Yes , 
 it covers more categories.
 Set up the next slide: if Texas can protect MORE, can it protect LESS? That is
 the floor-and-ceiling idea, and it is the structural key to the whole chapter.</a:t>
@@ -2870,12 +2870,12 @@
           <a:p>
             <a:r>
               <a:rPr lang="en-US" dirty="0"/>
-              <a:t>TIMING: 4 minutes. Draw this on the board as you talk — it lands better built
+              <a:t>TIMING: 4 minutes. Draw this on the board as you talk, it lands better built
 live than shown finished.
 THE ONE-SENTENCE VERSION: the U.S. Constitution is a floor, not a ceiling.
 Two consequences students should be able to state back:
   1. When the Supreme Court NARROWS a federal right, Texans do not automatically
-     lose it — Texas courts may still protect it under Article I.
+     lose it. Texas courts may still protect it under Article I.
   2. When the Supreme Court EXPANDS a federal right, Texas must comply even if
      state law says otherwise.
 This is also a practical point: Texas attorneys routinely plead both
@@ -2971,7 +2971,7 @@
               <a:t>TIMING: 5 minutes.
 THE FACT THAT SURPRISES THEM: for 80 years the Bill of Rights did not restrain
 Texas at all. Say it plainly and let it sit.
-"Selective" is the word to emphasize — not all at once, one right at a time,
+"Selective" is the word to emphasize, not all at once, one right at a time,
 across a century. Two provisions still are NOT incorporated: the Fifth
 Amendment's grand jury requirement and the Seventh Amendment's civil jury right.
 That is why Texas can structure those matters its own way.
@@ -3414,12 +3414,12 @@
           <a:p>
             <a:pPr indent="0" marL="0">
               <a:lnSpc>
-                <a:spcPts val="4600"/>
+                <a:spcPts val="5600"/>
               </a:lnSpc>
               <a:buNone/>
             </a:pPr>
             <a:r>
-              <a:rPr lang="en-US" sz="4200" b="1" dirty="0">
+              <a:rPr lang="en-US" sz="5000" b="1" dirty="0">
                 <a:solidFill>
                   <a:srgbClr val="FFFFFF"/>
                 </a:solidFill>
@@ -3429,17 +3429,17 @@
               </a:rPr>
               <a:t>Civil Liberties and</a:t>
             </a:r>
-            <a:endParaRPr lang="en-US" sz="4200" dirty="0"/>
+            <a:endParaRPr lang="en-US" sz="5000" dirty="0"/>
           </a:p>
           <a:p>
             <a:pPr indent="0" marL="0">
               <a:lnSpc>
-                <a:spcPts val="4600"/>
+                <a:spcPts val="5600"/>
               </a:lnSpc>
               <a:buNone/>
             </a:pPr>
             <a:r>
-              <a:rPr lang="en-US" sz="4200" b="1" dirty="0">
+              <a:rPr lang="en-US" sz="5000" b="1" dirty="0">
                 <a:solidFill>
                   <a:srgbClr val="FFFFFF"/>
                 </a:solidFill>
@@ -3449,7 +3449,7 @@
               </a:rPr>
               <a:t>Civil Rights in Texas</a:t>
             </a:r>
-            <a:endParaRPr lang="en-US" sz="4200" dirty="0"/>
+            <a:endParaRPr lang="en-US" sz="5000" dirty="0"/>
           </a:p>
         </p:txBody>
       </p:sp>
@@ -3517,27 +3517,7 @@
       </p:sp>
       <p:sp>
         <p:nvSpPr>
-          <p:cNvPr id="5" name="Shape 3"/>
-          <p:cNvSpPr/>
-          <p:nvPr/>
-        </p:nvSpPr>
-        <p:spPr>
-          <a:xfrm>
-            <a:off x="594360" y="5257800"/>
-            <a:ext cx="1005840" cy="32004"/>
-          </a:xfrm>
-          <a:prstGeom prst="rect">
-            <a:avLst/>
-          </a:prstGeom>
-          <a:solidFill>
-            <a:srgbClr val="B07D2B"/>
-          </a:solidFill>
-          <a:ln/>
-        </p:spPr>
-      </p:sp>
-      <p:sp>
-        <p:nvSpPr>
-          <p:cNvPr id="6" name="Text 4"/>
+          <p:cNvPr id="5" name="Text 3"/>
           <p:cNvSpPr txBox="1"/>
           <p:nvPr/>
         </p:nvSpPr>
@@ -3639,7 +3619,7 @@
                 <a:ea typeface="Calibri" pitchFamily="34" charset="-122"/>
                 <a:cs typeface="Calibri" pitchFamily="34" charset="-120"/>
               </a:rPr>
-              <a:t>EXPRESSION — DALLAS, 1984</a:t>
+              <a:t>EXPRESSION: DALLAS, 1984</a:t>
             </a:r>
             <a:endParaRPr lang="en-US" sz="1100" dirty="0"/>
           </a:p>
@@ -3653,24 +3633,24 @@
         </p:nvSpPr>
         <p:spPr>
           <a:xfrm>
-            <a:off x="594360" y="603504"/>
-            <a:ext cx="10088575" cy="777240"/>
-          </a:xfrm>
-          <a:prstGeom prst="rect">
-            <a:avLst/>
-          </a:prstGeom>
-          <a:noFill/>
-          <a:ln/>
-        </p:spPr>
-        <p:txBody>
-          <a:bodyPr wrap="square" lIns="0" tIns="0" rIns="0" bIns="0" rtlCol="0" anchor="ctr"/>
-          <a:lstStyle/>
-          <a:p>
-            <a:pPr indent="0" marL="0">
-              <a:buNone/>
-            </a:pPr>
-            <a:r>
-              <a:rPr lang="en-US" sz="3200" b="1" dirty="0">
+            <a:off x="594360" y="548640"/>
+            <a:ext cx="10545775" cy="1005840"/>
+          </a:xfrm>
+          <a:prstGeom prst="rect">
+            <a:avLst/>
+          </a:prstGeom>
+          <a:noFill/>
+          <a:ln/>
+        </p:spPr>
+        <p:txBody>
+          <a:bodyPr wrap="square" lIns="0" tIns="0" rIns="0" bIns="0" rtlCol="0" anchor="ctr"/>
+          <a:lstStyle/>
+          <a:p>
+            <a:pPr indent="0" marL="0">
+              <a:buNone/>
+            </a:pPr>
+            <a:r>
+              <a:rPr lang="en-US" sz="4000" b="1" dirty="0">
                 <a:solidFill>
                   <a:srgbClr val="002B5C"/>
                 </a:solidFill>
@@ -3680,7 +3660,7 @@
               </a:rPr>
               <a:t>Protection doesn't depend on approval</a:t>
             </a:r>
-            <a:endParaRPr lang="en-US" sz="3200" dirty="0"/>
+            <a:endParaRPr lang="en-US" sz="4000" dirty="0"/>
           </a:p>
         </p:txBody>
       </p:sp>
@@ -4179,24 +4159,24 @@
         </p:nvSpPr>
         <p:spPr>
           <a:xfrm>
-            <a:off x="594360" y="603504"/>
-            <a:ext cx="10088575" cy="777240"/>
-          </a:xfrm>
-          <a:prstGeom prst="rect">
-            <a:avLst/>
-          </a:prstGeom>
-          <a:noFill/>
-          <a:ln/>
-        </p:spPr>
-        <p:txBody>
-          <a:bodyPr wrap="square" lIns="0" tIns="0" rIns="0" bIns="0" rtlCol="0" anchor="ctr"/>
-          <a:lstStyle/>
-          <a:p>
-            <a:pPr indent="0" marL="0">
-              <a:buNone/>
-            </a:pPr>
-            <a:r>
-              <a:rPr lang="en-US" sz="3200" b="1" dirty="0">
+            <a:off x="594360" y="548640"/>
+            <a:ext cx="10545775" cy="1005840"/>
+          </a:xfrm>
+          <a:prstGeom prst="rect">
+            <a:avLst/>
+          </a:prstGeom>
+          <a:noFill/>
+          <a:ln/>
+        </p:spPr>
+        <p:txBody>
+          <a:bodyPr wrap="square" lIns="0" tIns="0" rIns="0" bIns="0" rtlCol="0" anchor="ctr"/>
+          <a:lstStyle/>
+          <a:p>
+            <a:pPr indent="0" marL="0">
+              <a:buNone/>
+            </a:pPr>
+            <a:r>
+              <a:rPr lang="en-US" sz="4000" b="1" dirty="0">
                 <a:solidFill>
                   <a:srgbClr val="002B5C"/>
                 </a:solidFill>
@@ -4206,7 +4186,7 @@
               </a:rPr>
               <a:t>Broad, but not absolute</a:t>
             </a:r>
-            <a:endParaRPr lang="en-US" sz="3200" dirty="0"/>
+            <a:endParaRPr lang="en-US" sz="4000" dirty="0"/>
           </a:p>
         </p:txBody>
       </p:sp>
@@ -5078,7 +5058,7 @@
                 <a:ea typeface="Calibri" pitchFamily="34" charset="-122"/>
                 <a:cs typeface="Calibri" pitchFamily="34" charset="-120"/>
               </a:rPr>
-              <a:t>Content-neutral rules — a parade permit is fine</a:t>
+              <a:t>Content-neutral rules; a parade permit is fine</a:t>
             </a:r>
             <a:endParaRPr lang="en-US" sz="1200" dirty="0"/>
           </a:p>
@@ -5269,24 +5249,24 @@
         </p:nvSpPr>
         <p:spPr>
           <a:xfrm>
-            <a:off x="594360" y="603504"/>
-            <a:ext cx="10088575" cy="777240"/>
-          </a:xfrm>
-          <a:prstGeom prst="rect">
-            <a:avLst/>
-          </a:prstGeom>
-          <a:noFill/>
-          <a:ln/>
-        </p:spPr>
-        <p:txBody>
-          <a:bodyPr wrap="square" lIns="0" tIns="0" rIns="0" bIns="0" rtlCol="0" anchor="ctr"/>
-          <a:lstStyle/>
-          <a:p>
-            <a:pPr indent="0" marL="0">
-              <a:buNone/>
-            </a:pPr>
-            <a:r>
-              <a:rPr lang="en-US" sz="3200" b="1" dirty="0">
+            <a:off x="594360" y="548640"/>
+            <a:ext cx="10545775" cy="1005840"/>
+          </a:xfrm>
+          <a:prstGeom prst="rect">
+            <a:avLst/>
+          </a:prstGeom>
+          <a:noFill/>
+          <a:ln/>
+        </p:spPr>
+        <p:txBody>
+          <a:bodyPr wrap="square" lIns="0" tIns="0" rIns="0" bIns="0" rtlCol="0" anchor="ctr"/>
+          <a:lstStyle/>
+          <a:p>
+            <a:pPr indent="0" marL="0">
+              <a:buNone/>
+            </a:pPr>
+            <a:r>
+              <a:rPr lang="en-US" sz="4000" b="1" dirty="0">
                 <a:solidFill>
                   <a:srgbClr val="002B5C"/>
                 </a:solidFill>
@@ -5296,7 +5276,7 @@
               </a:rPr>
               <a:t>Two clauses that pull against each other</a:t>
             </a:r>
-            <a:endParaRPr lang="en-US" sz="3200" dirty="0"/>
+            <a:endParaRPr lang="en-US" sz="4000" dirty="0"/>
           </a:p>
         </p:txBody>
       </p:sp>
@@ -5883,24 +5863,24 @@
         </p:nvSpPr>
         <p:spPr>
           <a:xfrm>
-            <a:off x="594360" y="603504"/>
-            <a:ext cx="10088575" cy="777240"/>
-          </a:xfrm>
-          <a:prstGeom prst="rect">
-            <a:avLst/>
-          </a:prstGeom>
-          <a:noFill/>
-          <a:ln/>
-        </p:spPr>
-        <p:txBody>
-          <a:bodyPr wrap="square" lIns="0" tIns="0" rIns="0" bIns="0" rtlCol="0" anchor="ctr"/>
-          <a:lstStyle/>
-          <a:p>
-            <a:pPr indent="0" marL="0">
-              <a:buNone/>
-            </a:pPr>
-            <a:r>
-              <a:rPr lang="en-US" sz="3200" b="1" dirty="0">
+            <a:off x="594360" y="548640"/>
+            <a:ext cx="10545775" cy="1005840"/>
+          </a:xfrm>
+          <a:prstGeom prst="rect">
+            <a:avLst/>
+          </a:prstGeom>
+          <a:noFill/>
+          <a:ln/>
+        </p:spPr>
+        <p:txBody>
+          <a:bodyPr wrap="square" lIns="0" tIns="0" rIns="0" bIns="0" rtlCol="0" anchor="ctr"/>
+          <a:lstStyle/>
+          <a:p>
+            <a:pPr indent="0" marL="0">
+              <a:buNone/>
+            </a:pPr>
+            <a:r>
+              <a:rPr lang="en-US" sz="4000" b="1" dirty="0">
                 <a:solidFill>
                   <a:srgbClr val="002B5C"/>
                 </a:solidFill>
@@ -5910,7 +5890,7 @@
               </a:rPr>
               <a:t>A dispute still unfolding</a:t>
             </a:r>
-            <a:endParaRPr lang="en-US" sz="3200" dirty="0"/>
+            <a:endParaRPr lang="en-US" sz="4000" dirty="0"/>
           </a:p>
         </p:txBody>
       </p:sp>
@@ -6718,24 +6698,24 @@
         </p:nvSpPr>
         <p:spPr>
           <a:xfrm>
-            <a:off x="594360" y="914400"/>
-            <a:ext cx="11002975" cy="685800"/>
-          </a:xfrm>
-          <a:prstGeom prst="rect">
-            <a:avLst/>
-          </a:prstGeom>
-          <a:noFill/>
-          <a:ln/>
-        </p:spPr>
-        <p:txBody>
-          <a:bodyPr wrap="square" lIns="0" tIns="0" rIns="0" bIns="0" rtlCol="0" anchor="ctr"/>
-          <a:lstStyle/>
-          <a:p>
-            <a:pPr indent="0" marL="0">
-              <a:buNone/>
-            </a:pPr>
-            <a:r>
-              <a:rPr lang="en-US" sz="3100" b="1" dirty="0">
+            <a:off x="594360" y="868680"/>
+            <a:ext cx="11002975" cy="914400"/>
+          </a:xfrm>
+          <a:prstGeom prst="rect">
+            <a:avLst/>
+          </a:prstGeom>
+          <a:noFill/>
+          <a:ln/>
+        </p:spPr>
+        <p:txBody>
+          <a:bodyPr wrap="square" lIns="0" tIns="0" rIns="0" bIns="0" rtlCol="0" anchor="ctr"/>
+          <a:lstStyle/>
+          <a:p>
+            <a:pPr indent="0" marL="0">
+              <a:buNone/>
+            </a:pPr>
+            <a:r>
+              <a:rPr lang="en-US" sz="3800" b="1" dirty="0">
                 <a:solidFill>
                   <a:srgbClr val="FFFFFF"/>
                 </a:solidFill>
@@ -6745,7 +6725,7 @@
               </a:rPr>
               <a:t>Expression, religion, and the limits of tolerance</a:t>
             </a:r>
-            <a:endParaRPr lang="en-US" sz="3100" dirty="0"/>
+            <a:endParaRPr lang="en-US" sz="3800" dirty="0"/>
           </a:p>
         </p:txBody>
       </p:sp>
@@ -6844,7 +6824,7 @@
                 <a:ea typeface="Calibri" pitchFamily="34" charset="-122"/>
                 <a:cs typeface="Calibri" pitchFamily="34" charset="-120"/>
               </a:rPr>
-              <a:t>Texas v. Johnson protected speech many Americans found deeply offensive. Is there any expression you would give government the power to punish — and who would you trust to draw that line?</a:t>
+              <a:t>Texas v. Johnson protected speech many Americans found deeply offensive. Is there any expression you would give government the power to punish, and who would you trust to draw that line?</a:t>
             </a:r>
             <a:endParaRPr lang="en-US" sz="1600" dirty="0"/>
           </a:p>
@@ -7260,7 +7240,7 @@
                 <a:ea typeface="Calibri" pitchFamily="34" charset="-122"/>
                 <a:cs typeface="Calibri" pitchFamily="34" charset="-120"/>
               </a:rPr>
-              <a:t>Freedom on paper in 1865. Equal citizenship took a century more — and three Texans who refused to wait.</a:t>
+              <a:t>Freedom on paper in 1865. Equal citizenship took a century more, and three Texans who refused to wait.</a:t>
             </a:r>
             <a:endParaRPr lang="en-US" sz="1500" dirty="0"/>
           </a:p>
@@ -7345,24 +7325,24 @@
         </p:nvSpPr>
         <p:spPr>
           <a:xfrm>
-            <a:off x="594360" y="603504"/>
-            <a:ext cx="10088575" cy="777240"/>
-          </a:xfrm>
-          <a:prstGeom prst="rect">
-            <a:avLst/>
-          </a:prstGeom>
-          <a:noFill/>
-          <a:ln/>
-        </p:spPr>
-        <p:txBody>
-          <a:bodyPr wrap="square" lIns="0" tIns="0" rIns="0" bIns="0" rtlCol="0" anchor="ctr"/>
-          <a:lstStyle/>
-          <a:p>
-            <a:pPr indent="0" marL="0">
-              <a:buNone/>
-            </a:pPr>
-            <a:r>
-              <a:rPr lang="en-US" sz="3200" b="1" dirty="0">
+            <a:off x="594360" y="548640"/>
+            <a:ext cx="10545775" cy="1005840"/>
+          </a:xfrm>
+          <a:prstGeom prst="rect">
+            <a:avLst/>
+          </a:prstGeom>
+          <a:noFill/>
+          <a:ln/>
+        </p:spPr>
+        <p:txBody>
+          <a:bodyPr wrap="square" lIns="0" tIns="0" rIns="0" bIns="0" rtlCol="0" anchor="ctr"/>
+          <a:lstStyle/>
+          <a:p>
+            <a:pPr indent="0" marL="0">
+              <a:buNone/>
+            </a:pPr>
+            <a:r>
+              <a:rPr lang="en-US" sz="4000" b="1" dirty="0">
                 <a:solidFill>
                   <a:srgbClr val="002B5C"/>
                 </a:solidFill>
@@ -7372,7 +7352,7 @@
               </a:rPr>
               <a:t>Freedom on paper, then a century of resistance</a:t>
             </a:r>
-            <a:endParaRPr lang="en-US" sz="3200" dirty="0"/>
+            <a:endParaRPr lang="en-US" sz="4000" dirty="0"/>
           </a:p>
         </p:txBody>
       </p:sp>
@@ -7472,7 +7452,7 @@
                 <a:ea typeface="Calibri" pitchFamily="34" charset="-122"/>
                 <a:cs typeface="Calibri" pitchFamily="34" charset="-120"/>
               </a:rPr>
-              <a:t>Juneteenth — June 19, 1865, Galveston</a:t>
+              <a:t>Juneteenth: June 19, 1865, Galveston</a:t>
             </a:r>
             <a:endParaRPr lang="en-US" sz="1100" dirty="0"/>
           </a:p>
@@ -7634,7 +7614,7 @@
                 <a:ea typeface="Calibri" pitchFamily="34" charset="-122"/>
                 <a:cs typeface="Calibri" pitchFamily="34" charset="-120"/>
               </a:rPr>
-              <a:t>After Reconstruction ends, Texas builds Jim Crow — segregation by law in schools, transit, and public accommodations.</a:t>
+              <a:t>After Reconstruction ends, Texas builds Jim Crow: segregation by law in schools, transit, and public accommodations.</a:t>
             </a:r>
             <a:endParaRPr lang="en-US" sz="1250" dirty="0"/>
           </a:p>
@@ -7796,7 +7776,7 @@
                 <a:ea typeface="Calibri" pitchFamily="34" charset="-122"/>
                 <a:cs typeface="Calibri" pitchFamily="34" charset="-120"/>
               </a:rPr>
-              <a:t>The Democratic primary — the only election that mattered in a one-party state — bars Black Texans entirely.</a:t>
+              <a:t>The Democratic primary, the only election that mattered in a one-party state, bars Black Texans entirely.</a:t>
             </a:r>
             <a:endParaRPr lang="en-US" sz="1250" dirty="0"/>
           </a:p>
@@ -7945,24 +7925,24 @@
         </p:nvSpPr>
         <p:spPr>
           <a:xfrm>
-            <a:off x="594360" y="603504"/>
-            <a:ext cx="10088575" cy="777240"/>
-          </a:xfrm>
-          <a:prstGeom prst="rect">
-            <a:avLst/>
-          </a:prstGeom>
-          <a:noFill/>
-          <a:ln/>
-        </p:spPr>
-        <p:txBody>
-          <a:bodyPr wrap="square" lIns="0" tIns="0" rIns="0" bIns="0" rtlCol="0" anchor="ctr"/>
-          <a:lstStyle/>
-          <a:p>
-            <a:pPr indent="0" marL="0">
-              <a:buNone/>
-            </a:pPr>
-            <a:r>
-              <a:rPr lang="en-US" sz="3200" b="1" dirty="0">
+            <a:off x="594360" y="548640"/>
+            <a:ext cx="10545775" cy="1005840"/>
+          </a:xfrm>
+          <a:prstGeom prst="rect">
+            <a:avLst/>
+          </a:prstGeom>
+          <a:noFill/>
+          <a:ln/>
+        </p:spPr>
+        <p:txBody>
+          <a:bodyPr wrap="square" lIns="0" tIns="0" rIns="0" bIns="0" rtlCol="0" anchor="ctr"/>
+          <a:lstStyle/>
+          <a:p>
+            <a:pPr indent="0" marL="0">
+              <a:buNone/>
+            </a:pPr>
+            <a:r>
+              <a:rPr lang="en-US" sz="4000" b="1" dirty="0">
                 <a:solidFill>
                   <a:srgbClr val="002B5C"/>
                 </a:solidFill>
@@ -7972,7 +7952,7 @@
               </a:rPr>
               <a:t>Three Texans who changed the country</a:t>
             </a:r>
-            <a:endParaRPr lang="en-US" sz="3200" dirty="0"/>
+            <a:endParaRPr lang="en-US" sz="4000" dirty="0"/>
           </a:p>
         </p:txBody>
       </p:sp>
@@ -8640,7 +8620,7 @@
                 <a:ea typeface="Calibri" pitchFamily="34" charset="-122"/>
                 <a:cs typeface="Calibri" pitchFamily="34" charset="-120"/>
               </a:rPr>
-              <a:t>Equal protection covers any group treated as “a class apart” — not only Black and white citizens.</a:t>
+              <a:t>Equal protection covers any group treated as “a class apart”, not only Black and white citizens.</a:t>
             </a:r>
             <a:endParaRPr lang="en-US" sz="1350" dirty="0"/>
           </a:p>
@@ -8784,24 +8764,24 @@
         </p:nvSpPr>
         <p:spPr>
           <a:xfrm>
-            <a:off x="594360" y="914400"/>
-            <a:ext cx="11002975" cy="685800"/>
-          </a:xfrm>
-          <a:prstGeom prst="rect">
-            <a:avLst/>
-          </a:prstGeom>
-          <a:noFill/>
-          <a:ln/>
-        </p:spPr>
-        <p:txBody>
-          <a:bodyPr wrap="square" lIns="0" tIns="0" rIns="0" bIns="0" rtlCol="0" anchor="ctr"/>
-          <a:lstStyle/>
-          <a:p>
-            <a:pPr indent="0" marL="0">
-              <a:buNone/>
-            </a:pPr>
-            <a:r>
-              <a:rPr lang="en-US" sz="3100" b="1" dirty="0">
+            <a:off x="594360" y="868680"/>
+            <a:ext cx="11002975" cy="914400"/>
+          </a:xfrm>
+          <a:prstGeom prst="rect">
+            <a:avLst/>
+          </a:prstGeom>
+          <a:noFill/>
+          <a:ln/>
+        </p:spPr>
+        <p:txBody>
+          <a:bodyPr wrap="square" lIns="0" tIns="0" rIns="0" bIns="0" rtlCol="0" anchor="ctr"/>
+          <a:lstStyle/>
+          <a:p>
+            <a:pPr indent="0" marL="0">
+              <a:buNone/>
+            </a:pPr>
+            <a:r>
+              <a:rPr lang="en-US" sz="3800" b="1" dirty="0">
                 <a:solidFill>
                   <a:srgbClr val="FFFFFF"/>
                 </a:solidFill>
@@ -8811,7 +8791,7 @@
               </a:rPr>
               <a:t>How rights actually get won</a:t>
             </a:r>
-            <a:endParaRPr lang="en-US" sz="3100" dirty="0"/>
+            <a:endParaRPr lang="en-US" sz="3800" dirty="0"/>
           </a:p>
         </p:txBody>
       </p:sp>
@@ -8910,7 +8890,7 @@
                 <a:ea typeface="Calibri" pitchFamily="34" charset="-122"/>
                 <a:cs typeface="Calibri" pitchFamily="34" charset="-120"/>
               </a:rPr>
-              <a:t>A dentist, a mail carrier, and a criminal defendant changed federal law. What does that suggest about how constitutional change actually happens — and what it costs the people who start it?</a:t>
+              <a:t>A dentist, a mail carrier, and a criminal defendant changed federal law. What does that suggest about how constitutional change actually happens, and what it costs the people who start it?</a:t>
             </a:r>
             <a:endParaRPr lang="en-US" sz="1600" dirty="0"/>
           </a:p>
@@ -9236,24 +9216,24 @@
         </p:nvSpPr>
         <p:spPr>
           <a:xfrm>
-            <a:off x="594360" y="603504"/>
-            <a:ext cx="10088575" cy="777240"/>
-          </a:xfrm>
-          <a:prstGeom prst="rect">
-            <a:avLst/>
-          </a:prstGeom>
-          <a:noFill/>
-          <a:ln/>
-        </p:spPr>
-        <p:txBody>
-          <a:bodyPr wrap="square" lIns="0" tIns="0" rIns="0" bIns="0" rtlCol="0" anchor="ctr"/>
-          <a:lstStyle/>
-          <a:p>
-            <a:pPr indent="0" marL="0">
-              <a:buNone/>
-            </a:pPr>
-            <a:r>
-              <a:rPr lang="en-US" sz="3200" b="1" dirty="0">
+            <a:off x="594360" y="548640"/>
+            <a:ext cx="10545775" cy="1005840"/>
+          </a:xfrm>
+          <a:prstGeom prst="rect">
+            <a:avLst/>
+          </a:prstGeom>
+          <a:noFill/>
+          <a:ln/>
+        </p:spPr>
+        <p:txBody>
+          <a:bodyPr wrap="square" lIns="0" tIns="0" rIns="0" bIns="0" rtlCol="0" anchor="ctr"/>
+          <a:lstStyle/>
+          <a:p>
+            <a:pPr indent="0" marL="0">
+              <a:buNone/>
+            </a:pPr>
+            <a:r>
+              <a:rPr lang="en-US" sz="4000" b="1" dirty="0">
                 <a:solidFill>
                   <a:srgbClr val="002B5C"/>
                 </a:solidFill>
@@ -9263,7 +9243,7 @@
               </a:rPr>
               <a:t>The framework behind every equal-protection case</a:t>
             </a:r>
-            <a:endParaRPr lang="en-US" sz="3200" dirty="0"/>
+            <a:endParaRPr lang="en-US" sz="4000" dirty="0"/>
           </a:p>
         </p:txBody>
       </p:sp>
@@ -9852,7 +9832,7 @@
                 <a:ea typeface="Calibri" pitchFamily="34" charset="-122"/>
                 <a:cs typeface="Calibri" pitchFamily="34" charset="-120"/>
               </a:rPr>
-              <a:t>Everything else — age, income, occupation</a:t>
+              <a:t>Everything else: age, income, occupation</a:t>
             </a:r>
             <a:endParaRPr lang="en-US" sz="1050" dirty="0"/>
           </a:p>
@@ -10043,7 +10023,7 @@
                 <a:ea typeface="Calibri" pitchFamily="34" charset="-122"/>
                 <a:cs typeface="Calibri" pitchFamily="34" charset="-120"/>
               </a:rPr>
-              <a:t>FOR THE INSTRUCTOR — DELETE BEFORE CLASS</a:t>
+              <a:t>FOR THE INSTRUCTOR: DELETE BEFORE CLASS</a:t>
             </a:r>
             <a:endParaRPr lang="en-US" sz="1100" dirty="0"/>
           </a:p>
@@ -10057,24 +10037,24 @@
         </p:nvSpPr>
         <p:spPr>
           <a:xfrm>
-            <a:off x="594360" y="603504"/>
-            <a:ext cx="10088575" cy="777240"/>
-          </a:xfrm>
-          <a:prstGeom prst="rect">
-            <a:avLst/>
-          </a:prstGeom>
-          <a:noFill/>
-          <a:ln/>
-        </p:spPr>
-        <p:txBody>
-          <a:bodyPr wrap="square" lIns="0" tIns="0" rIns="0" bIns="0" rtlCol="0" anchor="ctr"/>
-          <a:lstStyle/>
-          <a:p>
-            <a:pPr indent="0" marL="0">
-              <a:buNone/>
-            </a:pPr>
-            <a:r>
-              <a:rPr lang="en-US" sz="3200" b="1" dirty="0">
+            <a:off x="594360" y="548640"/>
+            <a:ext cx="10545775" cy="1005840"/>
+          </a:xfrm>
+          <a:prstGeom prst="rect">
+            <a:avLst/>
+          </a:prstGeom>
+          <a:noFill/>
+          <a:ln/>
+        </p:spPr>
+        <p:txBody>
+          <a:bodyPr wrap="square" lIns="0" tIns="0" rIns="0" bIns="0" rtlCol="0" anchor="ctr"/>
+          <a:lstStyle/>
+          <a:p>
+            <a:pPr indent="0" marL="0">
+              <a:buNone/>
+            </a:pPr>
+            <a:r>
+              <a:rPr lang="en-US" sz="4000" b="1" dirty="0">
                 <a:solidFill>
                   <a:srgbClr val="002B5C"/>
                 </a:solidFill>
@@ -10084,7 +10064,7 @@
               </a:rPr>
               <a:t>How to use this deck</a:t>
             </a:r>
-            <a:endParaRPr lang="en-US" sz="3200" dirty="0"/>
+            <a:endParaRPr lang="en-US" sz="4000" dirty="0"/>
           </a:p>
         </p:txBody>
       </p:sp>
@@ -10401,7 +10381,7 @@
                 <a:ea typeface="Calibri" pitchFamily="34" charset="-122"/>
                 <a:cs typeface="Calibri" pitchFamily="34" charset="-120"/>
               </a:rPr>
-              <a:t>Everything is a real text box or shape. Change wording, reorder, delete freely — nothing is a flattened image.</a:t>
+              <a:t>Everything is a real text box or shape. Change wording, reorder, delete freely. Nothing is a flattened image.</a:t>
             </a:r>
             <a:endParaRPr lang="en-US" sz="1250" dirty="0"/>
           </a:p>
@@ -10541,7 +10521,7 @@
                 <a:ea typeface="Calibri" pitchFamily="34" charset="-122"/>
                 <a:cs typeface="Calibri" pitchFamily="34" charset="-120"/>
               </a:rPr>
-              <a:t>Contested questions appear as paired panels, never labeled by party. Three gold “Pause and think” slides carry 2–3 discussion questions each — use one question, not all three.</a:t>
+              <a:t>Contested questions appear as paired panels, never labeled by party. Three gold “Pause and think” slides carry 2–3 discussion questions each. Use one question, not all three.</a:t>
             </a:r>
             <a:endParaRPr lang="en-US" sz="1250" dirty="0"/>
           </a:p>
@@ -10766,24 +10746,24 @@
         </p:nvSpPr>
         <p:spPr>
           <a:xfrm>
-            <a:off x="594360" y="603504"/>
-            <a:ext cx="10088575" cy="777240"/>
-          </a:xfrm>
-          <a:prstGeom prst="rect">
-            <a:avLst/>
-          </a:prstGeom>
-          <a:noFill/>
-          <a:ln/>
-        </p:spPr>
-        <p:txBody>
-          <a:bodyPr wrap="square" lIns="0" tIns="0" rIns="0" bIns="0" rtlCol="0" anchor="ctr"/>
-          <a:lstStyle/>
-          <a:p>
-            <a:pPr indent="0" marL="0">
-              <a:buNone/>
-            </a:pPr>
-            <a:r>
-              <a:rPr lang="en-US" sz="3200" b="1" dirty="0">
+            <a:off x="594360" y="548640"/>
+            <a:ext cx="10545775" cy="1005840"/>
+          </a:xfrm>
+          <a:prstGeom prst="rect">
+            <a:avLst/>
+          </a:prstGeom>
+          <a:noFill/>
+          <a:ln/>
+        </p:spPr>
+        <p:txBody>
+          <a:bodyPr wrap="square" lIns="0" tIns="0" rIns="0" bIns="0" rtlCol="0" anchor="ctr"/>
+          <a:lstStyle/>
+          <a:p>
+            <a:pPr indent="0" marL="0">
+              <a:buNone/>
+            </a:pPr>
+            <a:r>
+              <a:rPr lang="en-US" sz="4000" b="1" dirty="0">
                 <a:solidFill>
                   <a:srgbClr val="002B5C"/>
                 </a:solidFill>
@@ -10793,7 +10773,7 @@
               </a:rPr>
               <a:t>Every person within the state's jurisdiction</a:t>
             </a:r>
-            <a:endParaRPr lang="en-US" sz="3200" dirty="0"/>
+            <a:endParaRPr lang="en-US" sz="4000" dirty="0"/>
           </a:p>
         </p:txBody>
       </p:sp>
@@ -11292,24 +11272,24 @@
         </p:nvSpPr>
         <p:spPr>
           <a:xfrm>
-            <a:off x="594360" y="603504"/>
-            <a:ext cx="10088575" cy="777240"/>
-          </a:xfrm>
-          <a:prstGeom prst="rect">
-            <a:avLst/>
-          </a:prstGeom>
-          <a:noFill/>
-          <a:ln/>
-        </p:spPr>
-        <p:txBody>
-          <a:bodyPr wrap="square" lIns="0" tIns="0" rIns="0" bIns="0" rtlCol="0" anchor="ctr"/>
-          <a:lstStyle/>
-          <a:p>
-            <a:pPr indent="0" marL="0">
-              <a:buNone/>
-            </a:pPr>
-            <a:r>
-              <a:rPr lang="en-US" sz="3200" b="1" dirty="0">
+            <a:off x="594360" y="548640"/>
+            <a:ext cx="10545775" cy="1005840"/>
+          </a:xfrm>
+          <a:prstGeom prst="rect">
+            <a:avLst/>
+          </a:prstGeom>
+          <a:noFill/>
+          <a:ln/>
+        </p:spPr>
+        <p:txBody>
+          <a:bodyPr wrap="square" lIns="0" tIns="0" rIns="0" bIns="0" rtlCol="0" anchor="ctr"/>
+          <a:lstStyle/>
+          <a:p>
+            <a:pPr indent="0" marL="0">
+              <a:buNone/>
+            </a:pPr>
+            <a:r>
+              <a:rPr lang="en-US" sz="4000" b="1" dirty="0">
                 <a:solidFill>
                   <a:srgbClr val="002B5C"/>
                 </a:solidFill>
@@ -11319,7 +11299,7 @@
               </a:rPr>
               <a:t>Where the argument is now</a:t>
             </a:r>
-            <a:endParaRPr lang="en-US" sz="3200" dirty="0"/>
+            <a:endParaRPr lang="en-US" sz="4000" dirty="0"/>
           </a:p>
         </p:txBody>
       </p:sp>
@@ -12231,7 +12211,7 @@
                 <a:ea typeface="Calibri" pitchFamily="34" charset="-122"/>
                 <a:cs typeface="Calibri" pitchFamily="34" charset="-120"/>
               </a:rPr>
-              <a:t>Each row states the dispute, not a verdict. Ask which level of scrutiny applies — that is the analytical question.</a:t>
+              <a:t>Each row states the dispute, not a verdict. Ask which level of scrutiny applies. That is the analytical question.</a:t>
             </a:r>
             <a:endParaRPr lang="en-US" sz="1250" dirty="0"/>
           </a:p>
@@ -12316,24 +12296,24 @@
         </p:nvSpPr>
         <p:spPr>
           <a:xfrm>
-            <a:off x="594360" y="914400"/>
-            <a:ext cx="11002975" cy="685800"/>
-          </a:xfrm>
-          <a:prstGeom prst="rect">
-            <a:avLst/>
-          </a:prstGeom>
-          <a:noFill/>
-          <a:ln/>
-        </p:spPr>
-        <p:txBody>
-          <a:bodyPr wrap="square" lIns="0" tIns="0" rIns="0" bIns="0" rtlCol="0" anchor="ctr"/>
-          <a:lstStyle/>
-          <a:p>
-            <a:pPr indent="0" marL="0">
-              <a:buNone/>
-            </a:pPr>
-            <a:r>
-              <a:rPr lang="en-US" sz="3100" b="1" dirty="0">
+            <a:off x="594360" y="868680"/>
+            <a:ext cx="11002975" cy="914400"/>
+          </a:xfrm>
+          <a:prstGeom prst="rect">
+            <a:avLst/>
+          </a:prstGeom>
+          <a:noFill/>
+          <a:ln/>
+        </p:spPr>
+        <p:txBody>
+          <a:bodyPr wrap="square" lIns="0" tIns="0" rIns="0" bIns="0" rtlCol="0" anchor="ctr"/>
+          <a:lstStyle/>
+          <a:p>
+            <a:pPr indent="0" marL="0">
+              <a:buNone/>
+            </a:pPr>
+            <a:r>
+              <a:rPr lang="en-US" sz="3800" b="1" dirty="0">
                 <a:solidFill>
                   <a:srgbClr val="FFFFFF"/>
                 </a:solidFill>
@@ -12343,7 +12323,7 @@
               </a:rPr>
               <a:t>Apply the framework, not your priors</a:t>
             </a:r>
-            <a:endParaRPr lang="en-US" sz="3100" dirty="0"/>
+            <a:endParaRPr lang="en-US" sz="3800" dirty="0"/>
           </a:p>
         </p:txBody>
       </p:sp>
@@ -12768,24 +12748,24 @@
         </p:nvSpPr>
         <p:spPr>
           <a:xfrm>
-            <a:off x="594360" y="603504"/>
-            <a:ext cx="10088575" cy="777240"/>
-          </a:xfrm>
-          <a:prstGeom prst="rect">
-            <a:avLst/>
-          </a:prstGeom>
-          <a:noFill/>
-          <a:ln/>
-        </p:spPr>
-        <p:txBody>
-          <a:bodyPr wrap="square" lIns="0" tIns="0" rIns="0" bIns="0" rtlCol="0" anchor="ctr"/>
-          <a:lstStyle/>
-          <a:p>
-            <a:pPr indent="0" marL="0">
-              <a:buNone/>
-            </a:pPr>
-            <a:r>
-              <a:rPr lang="en-US" sz="3200" b="1" dirty="0">
+            <a:off x="594360" y="548640"/>
+            <a:ext cx="10545775" cy="1005840"/>
+          </a:xfrm>
+          <a:prstGeom prst="rect">
+            <a:avLst/>
+          </a:prstGeom>
+          <a:noFill/>
+          <a:ln/>
+        </p:spPr>
+        <p:txBody>
+          <a:bodyPr wrap="square" lIns="0" tIns="0" rIns="0" bIns="0" rtlCol="0" anchor="ctr"/>
+          <a:lstStyle/>
+          <a:p>
+            <a:pPr indent="0" marL="0">
+              <a:buNone/>
+            </a:pPr>
+            <a:r>
+              <a:rPr lang="en-US" sz="4000" b="1" dirty="0">
                 <a:solidFill>
                   <a:srgbClr val="002B5C"/>
                 </a:solidFill>
@@ -12795,7 +12775,7 @@
               </a:rPr>
               <a:t>Rights are not self-enforcing</a:t>
             </a:r>
-            <a:endParaRPr lang="en-US" sz="3200" dirty="0"/>
+            <a:endParaRPr lang="en-US" sz="4000" dirty="0"/>
           </a:p>
         </p:txBody>
       </p:sp>
@@ -13562,24 +13542,24 @@
         </p:nvSpPr>
         <p:spPr>
           <a:xfrm>
-            <a:off x="594360" y="603504"/>
-            <a:ext cx="10088575" cy="777240"/>
-          </a:xfrm>
-          <a:prstGeom prst="rect">
-            <a:avLst/>
-          </a:prstGeom>
-          <a:noFill/>
-          <a:ln/>
-        </p:spPr>
-        <p:txBody>
-          <a:bodyPr wrap="square" lIns="0" tIns="0" rIns="0" bIns="0" rtlCol="0" anchor="ctr"/>
-          <a:lstStyle/>
-          <a:p>
-            <a:pPr indent="0" marL="0">
-              <a:buNone/>
-            </a:pPr>
-            <a:r>
-              <a:rPr lang="en-US" sz="3200" b="1" dirty="0">
+            <a:off x="594360" y="548640"/>
+            <a:ext cx="10545775" cy="1005840"/>
+          </a:xfrm>
+          <a:prstGeom prst="rect">
+            <a:avLst/>
+          </a:prstGeom>
+          <a:noFill/>
+          <a:ln/>
+        </p:spPr>
+        <p:txBody>
+          <a:bodyPr wrap="square" lIns="0" tIns="0" rIns="0" bIns="0" rtlCol="0" anchor="ctr"/>
+          <a:lstStyle/>
+          <a:p>
+            <a:pPr indent="0" marL="0">
+              <a:buNone/>
+            </a:pPr>
+            <a:r>
+              <a:rPr lang="en-US" sz="4000" b="1" dirty="0">
                 <a:solidFill>
                   <a:srgbClr val="002B5C"/>
                 </a:solidFill>
@@ -13589,7 +13569,7 @@
               </a:rPr>
               <a:t>What students do next</a:t>
             </a:r>
-            <a:endParaRPr lang="en-US" sz="3200" dirty="0"/>
+            <a:endParaRPr lang="en-US" sz="4000" dirty="0"/>
           </a:p>
         </p:txBody>
       </p:sp>
@@ -13796,7 +13776,7 @@
                 <a:ea typeface="Calibri" pitchFamily="34" charset="-122"/>
                 <a:cs typeface="Calibri" pitchFamily="34" charset="-120"/>
               </a:rPr>
-              <a:t>Chapter 16 in the Trailblazer Trek — 8 sections, 1,495 points. Students submit the Completion Report.</a:t>
+              <a:t>Chapter 16 in the Trailblazer Trek: 8 sections, 1,495 points. Students submit the Completion Report.</a:t>
             </a:r>
             <a:endParaRPr lang="en-US" sz="1200" dirty="0"/>
           </a:p>
@@ -14136,7 +14116,7 @@
                 <a:ea typeface="Calibri" pitchFamily="34" charset="-122"/>
                 <a:cs typeface="Calibri" pitchFamily="34" charset="-120"/>
               </a:rPr>
-              <a:t>TEST-BANK.md Part A has 5 unseen items for this chapter, tagged to ACGM outcomes. Parts B and C are practice only — students have seen those.</a:t>
+              <a:t>TEST-BANK.md Part A has 5 unseen items for this chapter, tagged to ACGM outcomes. Parts B and C are practice only, since students have seen those.</a:t>
             </a:r>
             <a:endParaRPr lang="en-US" sz="1200" dirty="0"/>
           </a:p>
@@ -14222,7 +14202,7 @@
                 <a:ea typeface="Calibri" pitchFamily="34" charset="-122"/>
                 <a:cs typeface="Calibri" pitchFamily="34" charset="-120"/>
               </a:rPr>
-              <a:t>Outcome 7 (rights and responsibilities of citizens) — primary.   Outcomes 1 and 3 — supporting.   See ALIGNMENT.md.</a:t>
+              <a:t>Outcome 7 (rights and responsibilities of citizens) is primary. Outcomes 1 and 3 are supporting.   See ALIGNMENT.md.</a:t>
             </a:r>
             <a:endParaRPr lang="en-US" sz="1300" dirty="0"/>
           </a:p>
@@ -14307,24 +14287,24 @@
         </p:nvSpPr>
         <p:spPr>
           <a:xfrm>
-            <a:off x="594360" y="603504"/>
-            <a:ext cx="10088575" cy="777240"/>
-          </a:xfrm>
-          <a:prstGeom prst="rect">
-            <a:avLst/>
-          </a:prstGeom>
-          <a:noFill/>
-          <a:ln/>
-        </p:spPr>
-        <p:txBody>
-          <a:bodyPr wrap="square" lIns="0" tIns="0" rIns="0" bIns="0" rtlCol="0" anchor="ctr"/>
-          <a:lstStyle/>
-          <a:p>
-            <a:pPr indent="0" marL="0">
-              <a:buNone/>
-            </a:pPr>
-            <a:r>
-              <a:rPr lang="en-US" sz="3200" b="1" dirty="0">
+            <a:off x="594360" y="548640"/>
+            <a:ext cx="10545775" cy="1005840"/>
+          </a:xfrm>
+          <a:prstGeom prst="rect">
+            <a:avLst/>
+          </a:prstGeom>
+          <a:noFill/>
+          <a:ln/>
+        </p:spPr>
+        <p:txBody>
+          <a:bodyPr wrap="square" lIns="0" tIns="0" rIns="0" bIns="0" rtlCol="0" anchor="ctr"/>
+          <a:lstStyle/>
+          <a:p>
+            <a:pPr indent="0" marL="0">
+              <a:buNone/>
+            </a:pPr>
+            <a:r>
+              <a:rPr lang="en-US" sz="4000" b="1" dirty="0">
                 <a:solidFill>
                   <a:srgbClr val="002B5C"/>
                 </a:solidFill>
@@ -14334,7 +14314,7 @@
               </a:rPr>
               <a:t>Sources and further reading</a:t>
             </a:r>
-            <a:endParaRPr lang="en-US" sz="3200" dirty="0"/>
+            <a:endParaRPr lang="en-US" sz="4000" dirty="0"/>
           </a:p>
         </p:txBody>
       </p:sp>
@@ -14452,7 +14432,7 @@
                 <a:ea typeface="Calibri" pitchFamily="34" charset="-122"/>
                 <a:cs typeface="Calibri" pitchFamily="34" charset="-120"/>
               </a:rPr>
-              <a:t>Texas Constitution, Article I (Bill of Rights) — statutes.capitol.texas.gov   ·   U.S. Constitution, First and Fourteenth Amendments — archives.gov</a:t>
+              <a:t>Texas Constitution, Article I (Bill of Rights) at statutes.capitol.texas.gov   ·   U.S. Constitution, First and Fourteenth Amendments at archives.gov</a:t>
             </a:r>
             <a:endParaRPr lang="en-US" sz="1250" dirty="0"/>
           </a:p>
@@ -14533,7 +14513,7 @@
                 <a:ea typeface="Calibri" pitchFamily="34" charset="-122"/>
                 <a:cs typeface="Calibri" pitchFamily="34" charset="-120"/>
               </a:rPr>
-              <a:t>Opinions and oral argument audio for Johnson, Smith, Sweatt, Hernandez, Lawrence, Plyler, and Fisher — oyez.org</a:t>
+              <a:t>Opinions and oral argument audio for Johnson, Smith, Sweatt, Hernandez, Lawrence, Plyler, and Fisher at oyez.org</a:t>
             </a:r>
             <a:endParaRPr lang="en-US" sz="1250" dirty="0"/>
           </a:p>
@@ -14614,7 +14594,7 @@
                 <a:ea typeface="Calibri" pitchFamily="34" charset="-122"/>
                 <a:cs typeface="Calibri" pitchFamily="34" charset="-120"/>
               </a:rPr>
-              <a:t>Handbook of Texas Online (Texas State Historical Association) — entries on Juneteenth, the white primary, LULAC, the American GI Forum, Heman Sweatt, and Barbara Jordan</a:t>
+              <a:t>Handbook of Texas Online (Texas State Historical Association), entries on Juneteenth, the white primary, LULAC, the American GI Forum, Heman Sweatt, and Barbara Jordan</a:t>
             </a:r>
             <a:endParaRPr lang="en-US" sz="1250" dirty="0"/>
           </a:p>
@@ -14695,7 +14675,7 @@
                 <a:ea typeface="Calibri" pitchFamily="34" charset="-122"/>
                 <a:cs typeface="Calibri" pitchFamily="34" charset="-120"/>
               </a:rPr>
-              <a:t>OpenStax, American Government 3e (CC BY 4.0) — chapters on civil liberties and civil rights</a:t>
+              <a:t>OpenStax, American Government 3e (CC BY 4.0), chapters on civil liberties and civil rights</a:t>
             </a:r>
             <a:endParaRPr lang="en-US" sz="1250" dirty="0"/>
           </a:p>
@@ -14815,7 +14795,7 @@
                 <a:ea typeface="Calibri" pitchFamily="34" charset="-122"/>
                 <a:cs typeface="Calibri" pitchFamily="34" charset="-120"/>
               </a:rPr>
-              <a:t>This deck is licensed CC BY 4.0. Adopt it, adapt it, share it — attribution appreciated.</a:t>
+              <a:t>This deck is licensed CC BY 4.0. Adopt it, adapt it, share it. Attribution appreciated.</a:t>
             </a:r>
             <a:endParaRPr lang="en-US" sz="1250" dirty="0"/>
           </a:p>
@@ -14920,7 +14900,7 @@
               <a:buNone/>
             </a:pPr>
             <a:r>
-              <a:rPr lang="en-US" sz="3400" b="1" dirty="0">
+              <a:rPr lang="en-US" sz="4000" b="1" dirty="0">
                 <a:solidFill>
                   <a:srgbClr val="FFFFFF"/>
                 </a:solidFill>
@@ -14930,7 +14910,7 @@
               </a:rPr>
               <a:t>“Is there a liberty you would</a:t>
             </a:r>
-            <a:endParaRPr lang="en-US" sz="3400" dirty="0"/>
+            <a:endParaRPr lang="en-US" sz="4000" dirty="0"/>
           </a:p>
           <a:p>
             <a:pPr indent="0" marL="0">
@@ -14940,7 +14920,7 @@
               <a:buNone/>
             </a:pPr>
             <a:r>
-              <a:rPr lang="en-US" sz="3400" b="1" dirty="0">
+              <a:rPr lang="en-US" sz="4000" b="1" dirty="0">
                 <a:solidFill>
                   <a:srgbClr val="FFFFFF"/>
                 </a:solidFill>
@@ -14950,33 +14930,13 @@
               </a:rPr>
               <a:t>deny to people you oppose?”</a:t>
             </a:r>
-            <a:endParaRPr lang="en-US" sz="3400" dirty="0"/>
-          </a:p>
-        </p:txBody>
-      </p:sp>
-      <p:sp>
-        <p:nvSpPr>
-          <p:cNvPr id="4" name="Shape 2"/>
-          <p:cNvSpPr/>
-          <p:nvPr/>
-        </p:nvSpPr>
-        <p:spPr>
-          <a:xfrm>
-            <a:off x="594360" y="4434840"/>
-            <a:ext cx="1005840" cy="32004"/>
-          </a:xfrm>
-          <a:prstGeom prst="rect">
-            <a:avLst/>
-          </a:prstGeom>
-          <a:solidFill>
-            <a:srgbClr val="B07D2B"/>
-          </a:solidFill>
-          <a:ln/>
-        </p:spPr>
-      </p:sp>
-      <p:sp>
-        <p:nvSpPr>
-          <p:cNvPr id="5" name="Text 3"/>
+            <a:endParaRPr lang="en-US" sz="4000" dirty="0"/>
+          </a:p>
+        </p:txBody>
+      </p:sp>
+      <p:sp>
+        <p:nvSpPr>
+          <p:cNvPr id="4" name="Text 2"/>
           <p:cNvSpPr txBox="1"/>
           <p:nvPr/>
         </p:nvSpPr>
@@ -15092,24 +15052,24 @@
         </p:nvSpPr>
         <p:spPr>
           <a:xfrm>
-            <a:off x="594360" y="603504"/>
-            <a:ext cx="10088575" cy="777240"/>
-          </a:xfrm>
-          <a:prstGeom prst="rect">
-            <a:avLst/>
-          </a:prstGeom>
-          <a:noFill/>
-          <a:ln/>
-        </p:spPr>
-        <p:txBody>
-          <a:bodyPr wrap="square" lIns="0" tIns="0" rIns="0" bIns="0" rtlCol="0" anchor="ctr"/>
-          <a:lstStyle/>
-          <a:p>
-            <a:pPr indent="0" marL="0">
-              <a:buNone/>
-            </a:pPr>
-            <a:r>
-              <a:rPr lang="en-US" sz="3200" b="1" dirty="0">
+            <a:off x="594360" y="548640"/>
+            <a:ext cx="10545775" cy="1005840"/>
+          </a:xfrm>
+          <a:prstGeom prst="rect">
+            <a:avLst/>
+          </a:prstGeom>
+          <a:noFill/>
+          <a:ln/>
+        </p:spPr>
+        <p:txBody>
+          <a:bodyPr wrap="square" lIns="0" tIns="0" rIns="0" bIns="0" rtlCol="0" anchor="ctr"/>
+          <a:lstStyle/>
+          <a:p>
+            <a:pPr indent="0" marL="0">
+              <a:buNone/>
+            </a:pPr>
+            <a:r>
+              <a:rPr lang="en-US" sz="4000" b="1" dirty="0">
                 <a:solidFill>
                   <a:srgbClr val="002B5C"/>
                 </a:solidFill>
@@ -15119,7 +15079,7 @@
               </a:rPr>
               <a:t>Where we're going</a:t>
             </a:r>
-            <a:endParaRPr lang="en-US" sz="3200" dirty="0"/>
+            <a:endParaRPr lang="en-US" sz="4000" dirty="0"/>
           </a:p>
         </p:txBody>
       </p:sp>
@@ -15274,7 +15234,7 @@
                 <a:ea typeface="Calibri" pitchFamily="34" charset="-122"/>
                 <a:cs typeface="Calibri" pitchFamily="34" charset="-120"/>
               </a:rPr>
-              <a:t>civil liberties from civil rights — and explain why the difference decides how a case is argued.</a:t>
+              <a:t>civil liberties from civil rights, and explain why the difference decides how a case is argued.</a:t>
             </a:r>
             <a:endParaRPr lang="en-US" sz="1450" dirty="0"/>
           </a:p>
@@ -15831,24 +15791,24 @@
         </p:nvSpPr>
         <p:spPr>
           <a:xfrm>
-            <a:off x="594360" y="603504"/>
-            <a:ext cx="10088575" cy="777240"/>
-          </a:xfrm>
-          <a:prstGeom prst="rect">
-            <a:avLst/>
-          </a:prstGeom>
-          <a:noFill/>
-          <a:ln/>
-        </p:spPr>
-        <p:txBody>
-          <a:bodyPr wrap="square" lIns="0" tIns="0" rIns="0" bIns="0" rtlCol="0" anchor="ctr"/>
-          <a:lstStyle/>
-          <a:p>
-            <a:pPr indent="0" marL="0">
-              <a:buNone/>
-            </a:pPr>
-            <a:r>
-              <a:rPr lang="en-US" sz="3200" b="1" dirty="0">
+            <a:off x="594360" y="548640"/>
+            <a:ext cx="10545775" cy="1005840"/>
+          </a:xfrm>
+          <a:prstGeom prst="rect">
+            <a:avLst/>
+          </a:prstGeom>
+          <a:noFill/>
+          <a:ln/>
+        </p:spPr>
+        <p:txBody>
+          <a:bodyPr wrap="square" lIns="0" tIns="0" rIns="0" bIns="0" rtlCol="0" anchor="ctr"/>
+          <a:lstStyle/>
+          <a:p>
+            <a:pPr indent="0" marL="0">
+              <a:buNone/>
+            </a:pPr>
+            <a:r>
+              <a:rPr lang="en-US" sz="4000" b="1" dirty="0">
                 <a:solidFill>
                   <a:srgbClr val="002B5C"/>
                 </a:solidFill>
@@ -15858,7 +15818,7 @@
               </a:rPr>
               <a:t>Two words that are not synonyms</a:t>
             </a:r>
-            <a:endParaRPr lang="en-US" sz="3200" dirty="0"/>
+            <a:endParaRPr lang="en-US" sz="4000" dirty="0"/>
           </a:p>
         </p:txBody>
       </p:sp>
@@ -16563,24 +16523,24 @@
         </p:nvSpPr>
         <p:spPr>
           <a:xfrm>
-            <a:off x="594360" y="603504"/>
-            <a:ext cx="10088575" cy="777240"/>
-          </a:xfrm>
-          <a:prstGeom prst="rect">
-            <a:avLst/>
-          </a:prstGeom>
-          <a:noFill/>
-          <a:ln/>
-        </p:spPr>
-        <p:txBody>
-          <a:bodyPr wrap="square" lIns="0" tIns="0" rIns="0" bIns="0" rtlCol="0" anchor="ctr"/>
-          <a:lstStyle/>
-          <a:p>
-            <a:pPr indent="0" marL="0">
-              <a:buNone/>
-            </a:pPr>
-            <a:r>
-              <a:rPr lang="en-US" sz="3200" b="1" dirty="0">
+            <a:off x="594360" y="548640"/>
+            <a:ext cx="10545775" cy="1005840"/>
+          </a:xfrm>
+          <a:prstGeom prst="rect">
+            <a:avLst/>
+          </a:prstGeom>
+          <a:noFill/>
+          <a:ln/>
+        </p:spPr>
+        <p:txBody>
+          <a:bodyPr wrap="square" lIns="0" tIns="0" rIns="0" bIns="0" rtlCol="0" anchor="ctr"/>
+          <a:lstStyle/>
+          <a:p>
+            <a:pPr indent="0" marL="0">
+              <a:buNone/>
+            </a:pPr>
+            <a:r>
+              <a:rPr lang="en-US" sz="4000" b="1" dirty="0">
                 <a:solidFill>
                   <a:srgbClr val="002B5C"/>
                 </a:solidFill>
@@ -16590,7 +16550,7 @@
               </a:rPr>
               <a:t>Why so many landmark cases start here</a:t>
             </a:r>
-            <a:endParaRPr lang="en-US" sz="3200" dirty="0"/>
+            <a:endParaRPr lang="en-US" sz="4000" dirty="0"/>
           </a:p>
         </p:txBody>
       </p:sp>
@@ -16736,7 +16696,7 @@
                 <a:ea typeface="Calibri" pitchFamily="34" charset="-122"/>
                 <a:cs typeface="Calibri" pitchFamily="34" charset="-120"/>
               </a:rPr>
-              <a:t>Size and diversity — a huge, fast-growing state with large Black, Mexican American, and immigrant communities generated more disputes.</a:t>
+              <a:t>Size and diversity. A huge, fast-growing state with large Black, Mexican American, and immigrant communities generated more disputes.</a:t>
             </a:r>
             <a:endParaRPr lang="en-US" sz="1400" dirty="0"/>
           </a:p>
@@ -16784,7 +16744,7 @@
                 <a:ea typeface="Calibri" pitchFamily="34" charset="-122"/>
                 <a:cs typeface="Calibri" pitchFamily="34" charset="-120"/>
               </a:rPr>
-              <a:t>Individual Texans willing to carry a case all the way up — a dentist, a mail carrier, a defendant, sixteen families.</a:t>
+              <a:t>Individual Texans willing to carry a case all the way up: a dentist, a mail carrier, a defendant, sixteen families.</a:t>
             </a:r>
             <a:endParaRPr lang="en-US" sz="1400" dirty="0"/>
           </a:p>
@@ -16887,7 +16847,7 @@
                 <a:ea typeface="Calibri" pitchFamily="34" charset="-122"/>
                 <a:cs typeface="Calibri" pitchFamily="34" charset="-120"/>
               </a:rPr>
-              <a:t>landmark U.S. Supreme Court cases in this chapter began in Texas — on speech, voting, schools, ethnicity, privacy, immigration, and admissions.</a:t>
+              <a:t>landmark U.S. Supreme Court cases in this chapter began in Texas, covering speech, voting, schools, ethnicity, privacy, immigration, and admissions.</a:t>
             </a:r>
             <a:endParaRPr lang="en-US" sz="1300" dirty="0"/>
           </a:p>
@@ -16972,24 +16932,24 @@
         </p:nvSpPr>
         <p:spPr>
           <a:xfrm>
-            <a:off x="594360" y="603504"/>
-            <a:ext cx="10088575" cy="777240"/>
-          </a:xfrm>
-          <a:prstGeom prst="rect">
-            <a:avLst/>
-          </a:prstGeom>
-          <a:noFill/>
-          <a:ln/>
-        </p:spPr>
-        <p:txBody>
-          <a:bodyPr wrap="square" lIns="0" tIns="0" rIns="0" bIns="0" rtlCol="0" anchor="ctr"/>
-          <a:lstStyle/>
-          <a:p>
-            <a:pPr indent="0" marL="0">
-              <a:buNone/>
-            </a:pPr>
-            <a:r>
-              <a:rPr lang="en-US" sz="3200" b="1" dirty="0">
+            <a:off x="594360" y="548640"/>
+            <a:ext cx="10545775" cy="1005840"/>
+          </a:xfrm>
+          <a:prstGeom prst="rect">
+            <a:avLst/>
+          </a:prstGeom>
+          <a:noFill/>
+          <a:ln/>
+        </p:spPr>
+        <p:txBody>
+          <a:bodyPr wrap="square" lIns="0" tIns="0" rIns="0" bIns="0" rtlCol="0" anchor="ctr"/>
+          <a:lstStyle/>
+          <a:p>
+            <a:pPr indent="0" marL="0">
+              <a:buNone/>
+            </a:pPr>
+            <a:r>
+              <a:rPr lang="en-US" sz="4000" b="1" dirty="0">
                 <a:solidFill>
                   <a:srgbClr val="002B5C"/>
                 </a:solidFill>
@@ -16999,7 +16959,7 @@
               </a:rPr>
               <a:t>Texas put its Bill of Rights first</a:t>
             </a:r>
-            <a:endParaRPr lang="en-US" sz="3200" dirty="0"/>
+            <a:endParaRPr lang="en-US" sz="4000" dirty="0"/>
           </a:p>
         </p:txBody>
       </p:sp>
@@ -17102,7 +17062,7 @@
                 <a:ea typeface="Calibri" pitchFamily="34" charset="-122"/>
                 <a:cs typeface="Calibri" pitchFamily="34" charset="-120"/>
               </a:rPr>
-              <a:t>Texas has had seven constitutions. The 1876 document opens with rights — before it describes a single power.</a:t>
+              <a:t>Texas has had seven constitutions. The 1876 document opens with rights, before it describes a single power.</a:t>
             </a:r>
             <a:endParaRPr lang="en-US" sz="1150" dirty="0"/>
           </a:p>
@@ -17183,7 +17143,7 @@
                 <a:ea typeface="Calibri" pitchFamily="34" charset="-122"/>
                 <a:cs typeface="Calibri" pitchFamily="34" charset="-120"/>
               </a:rPr>
-              <a:t>The U.S. Bill of Rights arrived in 1791 as ten amendments. Texas put rights in Article I — first, before any grant of power.</a:t>
+              <a:t>The U.S. Bill of Rights arrived in 1791 as ten amendments. Texas put rights in Article I: first, before any grant of power.</a:t>
             </a:r>
             <a:endParaRPr lang="en-US" sz="1350" dirty="0"/>
           </a:p>
@@ -17430,24 +17390,24 @@
         </p:nvSpPr>
         <p:spPr>
           <a:xfrm>
-            <a:off x="594360" y="603504"/>
-            <a:ext cx="10088575" cy="777240"/>
-          </a:xfrm>
-          <a:prstGeom prst="rect">
-            <a:avLst/>
-          </a:prstGeom>
-          <a:noFill/>
-          <a:ln/>
-        </p:spPr>
-        <p:txBody>
-          <a:bodyPr wrap="square" lIns="0" tIns="0" rIns="0" bIns="0" rtlCol="0" anchor="ctr"/>
-          <a:lstStyle/>
-          <a:p>
-            <a:pPr indent="0" marL="0">
-              <a:buNone/>
-            </a:pPr>
-            <a:r>
-              <a:rPr lang="en-US" sz="3200" b="1" dirty="0">
+            <a:off x="594360" y="548640"/>
+            <a:ext cx="10545775" cy="1005840"/>
+          </a:xfrm>
+          <a:prstGeom prst="rect">
+            <a:avLst/>
+          </a:prstGeom>
+          <a:noFill/>
+          <a:ln/>
+        </p:spPr>
+        <p:txBody>
+          <a:bodyPr wrap="square" lIns="0" tIns="0" rIns="0" bIns="0" rtlCol="0" anchor="ctr"/>
+          <a:lstStyle/>
+          <a:p>
+            <a:pPr indent="0" marL="0">
+              <a:buNone/>
+            </a:pPr>
+            <a:r>
+              <a:rPr lang="en-US" sz="4000" b="1" dirty="0">
                 <a:solidFill>
                   <a:srgbClr val="002B5C"/>
                 </a:solidFill>
@@ -17457,7 +17417,7 @@
               </a:rPr>
               <a:t>A guarantee the nation never adopted</a:t>
             </a:r>
-            <a:endParaRPr lang="en-US" sz="3200" dirty="0"/>
+            <a:endParaRPr lang="en-US" sz="4000" dirty="0"/>
           </a:p>
         </p:txBody>
       </p:sp>
@@ -17602,7 +17562,7 @@
                 <a:ea typeface="Calibri" pitchFamily="34" charset="-122"/>
                 <a:cs typeface="Calibri" pitchFamily="34" charset="-120"/>
               </a:rPr>
-              <a:t>Texas Constitution, Article I, Section 3a — adopted by Texas voters in 1972</a:t>
+              <a:t>Texas Constitution, Article I, Section 3a. Adopted by Texas voters in 1972</a:t>
             </a:r>
             <a:endParaRPr lang="en-US" sz="1150" dirty="0"/>
           </a:p>
@@ -18050,24 +18010,24 @@
         </p:nvSpPr>
         <p:spPr>
           <a:xfrm>
-            <a:off x="594360" y="603504"/>
-            <a:ext cx="10088575" cy="777240"/>
-          </a:xfrm>
-          <a:prstGeom prst="rect">
-            <a:avLst/>
-          </a:prstGeom>
-          <a:noFill/>
-          <a:ln/>
-        </p:spPr>
-        <p:txBody>
-          <a:bodyPr wrap="square" lIns="0" tIns="0" rIns="0" bIns="0" rtlCol="0" anchor="ctr"/>
-          <a:lstStyle/>
-          <a:p>
-            <a:pPr indent="0" marL="0">
-              <a:buNone/>
-            </a:pPr>
-            <a:r>
-              <a:rPr lang="en-US" sz="3200" b="1" dirty="0">
+            <a:off x="594360" y="548640"/>
+            <a:ext cx="10545775" cy="1005840"/>
+          </a:xfrm>
+          <a:prstGeom prst="rect">
+            <a:avLst/>
+          </a:prstGeom>
+          <a:noFill/>
+          <a:ln/>
+        </p:spPr>
+        <p:txBody>
+          <a:bodyPr wrap="square" lIns="0" tIns="0" rIns="0" bIns="0" rtlCol="0" anchor="ctr"/>
+          <a:lstStyle/>
+          <a:p>
+            <a:pPr indent="0" marL="0">
+              <a:buNone/>
+            </a:pPr>
+            <a:r>
+              <a:rPr lang="en-US" sz="4000" b="1" dirty="0">
                 <a:solidFill>
                   <a:srgbClr val="002B5C"/>
                 </a:solidFill>
@@ -18077,7 +18037,7 @@
               </a:rPr>
               <a:t>Federal floor, state ceiling</a:t>
             </a:r>
-            <a:endParaRPr lang="en-US" sz="3200" dirty="0"/>
+            <a:endParaRPr lang="en-US" sz="4000" dirty="0"/>
           </a:p>
         </p:txBody>
       </p:sp>
@@ -18173,7 +18133,7 @@
                 <a:ea typeface="Calibri" pitchFamily="34" charset="-122"/>
                 <a:cs typeface="Calibri" pitchFamily="34" charset="-120"/>
               </a:rPr>
-              <a:t>STATE CEILING — Texas may protect MORE</a:t>
+              <a:t>STATE CEILING: Texas may protect MORE</a:t>
             </a:r>
             <a:endParaRPr lang="en-US" sz="1300" dirty="0"/>
           </a:p>
@@ -18333,7 +18293,7 @@
                 <a:ea typeface="Calibri" pitchFamily="34" charset="-122"/>
                 <a:cs typeface="Calibri" pitchFamily="34" charset="-120"/>
               </a:rPr>
-              <a:t>A Texan whose federal claim fails may still win under the Texas Constitution — lawyers here plead both</a:t>
+              <a:t>A Texan whose federal claim fails may still win under the Texas Constitution, and lawyers here plead both</a:t>
             </a:r>
             <a:endParaRPr lang="en-US" sz="1300" dirty="0"/>
           </a:p>
@@ -18392,7 +18352,7 @@
                 <a:ea typeface="Calibri" pitchFamily="34" charset="-122"/>
                 <a:cs typeface="Calibri" pitchFamily="34" charset="-120"/>
               </a:rPr>
-              <a:t>FEDERAL FLOOR — no state may go BELOW</a:t>
+              <a:t>FEDERAL FLOOR: no state may go BELOW</a:t>
             </a:r>
             <a:endParaRPr lang="en-US" sz="1300" dirty="0"/>
           </a:p>
@@ -18555,24 +18515,24 @@
         </p:nvSpPr>
         <p:spPr>
           <a:xfrm>
-            <a:off x="594360" y="603504"/>
-            <a:ext cx="10088575" cy="777240"/>
-          </a:xfrm>
-          <a:prstGeom prst="rect">
-            <a:avLst/>
-          </a:prstGeom>
-          <a:noFill/>
-          <a:ln/>
-        </p:spPr>
-        <p:txBody>
-          <a:bodyPr wrap="square" lIns="0" tIns="0" rIns="0" bIns="0" rtlCol="0" anchor="ctr"/>
-          <a:lstStyle/>
-          <a:p>
-            <a:pPr indent="0" marL="0">
-              <a:buNone/>
-            </a:pPr>
-            <a:r>
-              <a:rPr lang="en-US" sz="3200" b="1" dirty="0">
+            <a:off x="594360" y="548640"/>
+            <a:ext cx="10545775" cy="1005840"/>
+          </a:xfrm>
+          <a:prstGeom prst="rect">
+            <a:avLst/>
+          </a:prstGeom>
+          <a:noFill/>
+          <a:ln/>
+        </p:spPr>
+        <p:txBody>
+          <a:bodyPr wrap="square" lIns="0" tIns="0" rIns="0" bIns="0" rtlCol="0" anchor="ctr"/>
+          <a:lstStyle/>
+          <a:p>
+            <a:pPr indent="0" marL="0">
+              <a:buNone/>
+            </a:pPr>
+            <a:r>
+              <a:rPr lang="en-US" sz="4000" b="1" dirty="0">
                 <a:solidFill>
                   <a:srgbClr val="002B5C"/>
                 </a:solidFill>
@@ -18582,7 +18542,7 @@
               </a:rPr>
               <a:t>How federal rights reached Texas</a:t>
             </a:r>
-            <a:endParaRPr lang="en-US" sz="3200" dirty="0"/>
+            <a:endParaRPr lang="en-US" sz="4000" dirty="0"/>
           </a:p>
         </p:txBody>
       </p:sp>
@@ -19142,7 +19102,7 @@
                 <a:ea typeface="Calibri" pitchFamily="34" charset="-122"/>
                 <a:cs typeface="Calibri" pitchFamily="34" charset="-120"/>
               </a:rPr>
-              <a:t>The Court applies the Bill of Rights to the states one provision at a time — speech 1925, religion 1940s, criminal rights 1960s, arms 2010.</a:t>
+              <a:t>The Court applies the Bill of Rights to the states one provision at a time: speech 1925, religion 1940s, criminal rights 1960s, arms 2010.</a:t>
             </a:r>
             <a:endParaRPr lang="en-US" sz="1200" dirty="0"/>
           </a:p>

--- a/slides/Chapter 16 - Civil Liberties and Civil Rights (Lecture Deck).pptx
+++ b/slides/Chapter 16 - Civil Liberties and Civil Rights (Lecture Deck).pptx
@@ -528,8 +528,8 @@
             <a:r>
               <a:rPr lang="en-US" dirty="0"/>
               <a:t>CHAPTER 16: CIVIL LIBERTIES AND CIVIL RIGHTS IN TEXAS
-Full deck runs about 70 minutes with two discussion breaks; see the "How to use
-this deck" slide for shorter versions.
+Full deck runs about 80 minutes with all three discussion pauses; see the "How to
+use this deck" slide for shorter versions.
 OPENING (2 min). Ask before showing anything else: "Name a right you have."
 Students almost always name liberties, speech, religion, guns. Note that, then
 ask: "Is the right to be treated equally by your government on that list?" That
@@ -924,6 +924,10 @@
 academic year. Confirm the current posture before class, a Supreme Court grant,
 denial, or ruling would change the last box. The module and this deck are
 reviewed each legislative session.
+As of Oct 30, 2026: cert petition pending; Texas's brief in opposition due
+Nov 10, 2026. A second petition (Cribbs Ringer v. Comal ISD) and a statewide
+class action (Ashby v. Schertz-Cibolo-Universal City ISD, filed Dec 2025) are
+also pending.
 HOW TO RUN THE DISCUSSION (this works better than open debate):
   1. Ask students to argue the side they DISAGREE with, in pairs, for 3 minutes.
   2. Then ask: "What was the strongest point you had to make?"
@@ -1717,8 +1721,11 @@
 Another 5–4 case. The dissent argued this was a policy judgment for legislatures
 rather than courts, worth presenting fairly.
 CURRENCY NOTE: state authority over immigration is actively litigated, including
-Texas's SB 4 (2023). Check the posture before teaching if you plan to go beyond
-Plyler itself.
+Texas's SB 4 (2023). As of fall 2026 the law is being enforced: the en banc Fifth
+Circuit vacated the first injunction on standing grounds (Apr 24, 2026), and a
+Fifth Circuit panel stayed a second injunction (May 29, 2026) while the appeal
+proceeds. Check the posture before teaching if you plan to go beyond Plyler
+itself.
 This is a slide where students may have personal stakes. Teach the holding and
 the reasoning; you do not need to invite disclosure, and you should not.</a:t>
             </a:r>
@@ -2587,7 +2594,8 @@
 people with specific grievances, not by philosophers.
 Preview the seven so students hear the names early: Johnson (flag burning),
 Smith v. Allwright (white primary), Sweatt (UT law school), Hernandez (juries),
-Lawrence (privacy), Plyler (school access), Fisher (admissions).
+Lawrence (privacy), Plyler (school access), Fisher (admissions). Roe v. Wade
+(Dallas County, 1973) also began here and is covered in the privacy section.
 If you want a hook: ask which of those they've heard of. Most will know flag
 burning and none will know Hernandez. That asymmetry is worth naming out loud , 
 whose rights cases get remembered is itself a question worth asking.</a:t>
@@ -2972,9 +2980,10 @@
 THE FACT THAT SURPRISES THEM: for 80 years the Bill of Rights did not restrain
 Texas at all. Say it plainly and let it sit.
 "Selective" is the word to emphasize, not all at once, one right at a time,
-across a century. Two provisions still are NOT incorporated: the Fifth
-Amendment's grand jury requirement and the Seventh Amendment's civil jury right.
-That is why Texas can structure those matters its own way.
+across a century. The main provisions still NOT incorporated are the Fifth
+Amendment's grand jury requirement and the Seventh Amendment's civil jury right
+(the Third Amendment has never been tested at the Court). That is why Texas can
+structure those matters its own way.
 TIE IT TOGETHER: every time a headline says "a federal judge struck down a Texas
 law under the First Amendment," incorporation is the reason a federal amendment
 reached a state law at all.
@@ -5647,7 +5656,7 @@
                 <a:ea typeface="Calibri" pitchFamily="34" charset="-122"/>
                 <a:cs typeface="Calibri" pitchFamily="34" charset="-120"/>
               </a:rPr>
-              <a:t>Government may not interfere with individuals practicing their faith. Texas Article I, Section 6 protects worship and bars religious tests for office.</a:t>
+              <a:t>Government may not interfere with individuals practicing their faith. Texas Article I, Section 6 protects freedom of worship, and Section 4 bars any religious test for office.</a:t>
             </a:r>
             <a:endParaRPr lang="en-US" sz="1300" dirty="0"/>
           </a:p>
@@ -6571,7 +6580,7 @@
                 <a:ea typeface="Calibri" pitchFamily="34" charset="-122"/>
                 <a:cs typeface="Calibri" pitchFamily="34" charset="-120"/>
               </a:rPr>
-              <a:t>Now</a:t>
+              <a:t>Aug 2026</a:t>
             </a:r>
             <a:endParaRPr lang="en-US" sz="1150" dirty="0"/>
           </a:p>
@@ -6613,7 +6622,7 @@
                 <a:ea typeface="Calibri" pitchFamily="34" charset="-122"/>
                 <a:cs typeface="Calibri" pitchFamily="34" charset="-120"/>
               </a:rPr>
-              <a:t>Families have asked the U.S. Supreme Court to take the case</a:t>
+              <a:t>Families petition the U.S. Supreme Court (No. 26-257); Texas's response due Nov 10, 2026. No decision yet on whether the Court will hear it</a:t>
             </a:r>
             <a:endParaRPr lang="en-US" sz="1150" dirty="0"/>
           </a:p>
@@ -11921,7 +11930,7 @@
                 <a:ea typeface="Calibri" pitchFamily="34" charset="-122"/>
                 <a:cs typeface="Calibri" pitchFamily="34" charset="-120"/>
               </a:rPr>
-              <a:t>SB 4 (2023) made unlawful entry a state crime; challenged as conflicting with federal authority.</a:t>
+              <a:t>SB 4 (2023) made unlawful entry a state crime. Blocked for over two years, it took effect in 2026 after the full Fifth Circuit (Apr 2026, 10–7) dismissed the original challenge on standing grounds and a later injunction was stayed; appeals continue.</a:t>
             </a:r>
             <a:endParaRPr lang="en-US" sz="1150" dirty="0"/>
           </a:p>
@@ -16847,7 +16856,7 @@
                 <a:ea typeface="Calibri" pitchFamily="34" charset="-122"/>
                 <a:cs typeface="Calibri" pitchFamily="34" charset="-120"/>
               </a:rPr>
-              <a:t>landmark U.S. Supreme Court cases in this chapter began in Texas, covering speech, voting, schools, ethnicity, privacy, immigration, and admissions.</a:t>
+              <a:t>of this chapter's landmark U.S. Supreme Court cases began in Texas, covering speech, voting, schools, ethnicity, privacy, immigration, and admissions. An eighth, Roe v. Wade, began in Dallas.</a:t>
             </a:r>
             <a:endParaRPr lang="en-US" sz="1300" dirty="0"/>
           </a:p>
